--- a/PPT模板.pptx
+++ b/PPT模板.pptx
@@ -799,7 +799,7 @@
           <a:blip r:embed="rId3">
             <a:extLst>
               <a:ext uri="{96DAC541-7B7A-43D3-8B79-37D633B846F1}">
-                <asvg:svgBlip xmlns:asvg="http://schemas.microsoft.com/office/drawing/2016/SVG/main" xmlns="" r:embed="rId4"/>
+                <asvg:svgBlip xmlns="" xmlns:asvg="http://schemas.microsoft.com/office/drawing/2016/SVG/main" r:embed="rId4"/>
               </a:ext>
             </a:extLst>
           </a:blip>
@@ -5243,7 +5243,7 @@
         <p:spPr>
           <a:xfrm>
             <a:off x="809108" y="2301123"/>
-            <a:ext cx="11282855" cy="830997"/>
+            <a:ext cx="11282855" cy="1674817"/>
           </a:xfrm>
           <a:prstGeom prst="rect">
             <a:avLst/>
@@ -5258,7 +5258,7 @@
           </a:effectLst>
           <a:extLst>
             <a:ext uri="{C572A759-6A51-4108-AA02-DFA0A04FC94B}">
-              <ma14:wrappingTextBoxFlag xmlns="" xmlns:ma14="http://schemas.microsoft.com/office/mac/drawingml/2011/main" val="1"/>
+              <ma14:wrappingTextBoxFlag xmlns:ma14="http://schemas.microsoft.com/office/mac/drawingml/2011/main" xmlns="" val="1"/>
             </a:ext>
           </a:extLst>
         </p:spPr>
@@ -5287,7 +5287,7 @@
               <a:defRPr/>
             </a:pPr>
             <a:r>
-              <a:rPr kumimoji="1" lang="en-US" altLang="zh-TW" sz="5400" spc="0" dirty="0" smtClean="0">
+              <a:rPr kumimoji="1" lang="en-US" altLang="zh-CN" sz="5400" spc="0" dirty="0" smtClean="0">
                 <a:ln w="12700">
                   <a:noFill/>
                 </a:ln>
@@ -5297,7 +5297,100 @@
                 <a:latin typeface="+mj-lt"/>
                 <a:ea typeface="Microsoft YaHei" panose="020B0503020204020204" pitchFamily="34" charset="-122"/>
               </a:rPr>
-              <a:t>XXXXXXX</a:t>
+              <a:t>XX</a:t>
+            </a:r>
+            <a:r>
+              <a:rPr kumimoji="1" lang="zh-CN" altLang="en-US" sz="5400" spc="0" dirty="0" smtClean="0">
+                <a:ln w="12700">
+                  <a:noFill/>
+                </a:ln>
+                <a:solidFill>
+                  <a:srgbClr val="EF5149"/>
+                </a:solidFill>
+                <a:latin typeface="+mj-lt"/>
+                <a:ea typeface="Microsoft YaHei" panose="020B0503020204020204" pitchFamily="34" charset="-122"/>
+              </a:rPr>
+              <a:t>設備一鍵自動分析報告</a:t>
+            </a:r>
+            <a:endParaRPr kumimoji="1" lang="en-US" altLang="zh-CN" sz="5400" spc="0" dirty="0" smtClean="0">
+              <a:ln w="12700">
+                <a:noFill/>
+              </a:ln>
+              <a:solidFill>
+                <a:srgbClr val="EF5149"/>
+              </a:solidFill>
+              <a:latin typeface="+mj-lt"/>
+              <a:ea typeface="Microsoft YaHei" panose="020B0503020204020204" pitchFamily="34" charset="-122"/>
+            </a:endParaRPr>
+          </a:p>
+          <a:p>
+            <a:pPr lvl="0" algn="l">
+              <a:defRPr/>
+            </a:pPr>
+            <a:r>
+              <a:rPr kumimoji="1" lang="en-US" altLang="zh-CN" sz="5400" spc="0" dirty="0" smtClean="0">
+                <a:ln w="12700">
+                  <a:noFill/>
+                </a:ln>
+                <a:solidFill>
+                  <a:srgbClr val="EF5149"/>
+                </a:solidFill>
+                <a:latin typeface="+mj-lt"/>
+                <a:ea typeface="Microsoft YaHei" panose="020B0503020204020204" pitchFamily="34" charset="-122"/>
+              </a:rPr>
+              <a:t>——UPH</a:t>
+            </a:r>
+            <a:r>
+              <a:rPr kumimoji="1" lang="zh-CN" altLang="en-US" sz="5400" spc="0" dirty="0" smtClean="0">
+                <a:ln w="12700">
+                  <a:noFill/>
+                </a:ln>
+                <a:solidFill>
+                  <a:srgbClr val="EF5149"/>
+                </a:solidFill>
+                <a:latin typeface="+mj-lt"/>
+                <a:ea typeface="Microsoft YaHei" panose="020B0503020204020204" pitchFamily="34" charset="-122"/>
+              </a:rPr>
+              <a:t>、</a:t>
+            </a:r>
+            <a:r>
+              <a:rPr kumimoji="1" lang="en-US" altLang="zh-CN" sz="5400" spc="0" dirty="0" smtClean="0">
+                <a:ln w="12700">
+                  <a:noFill/>
+                </a:ln>
+                <a:solidFill>
+                  <a:srgbClr val="EF5149"/>
+                </a:solidFill>
+                <a:latin typeface="+mj-lt"/>
+                <a:ea typeface="Microsoft YaHei" panose="020B0503020204020204" pitchFamily="34" charset="-122"/>
+              </a:rPr>
+              <a:t>EFF</a:t>
+            </a:r>
+            <a:r>
+              <a:rPr kumimoji="1" lang="zh-CN" altLang="en-US" sz="5400" spc="0" dirty="0" smtClean="0">
+                <a:ln w="12700">
+                  <a:noFill/>
+                </a:ln>
+                <a:solidFill>
+                  <a:srgbClr val="EF5149"/>
+                </a:solidFill>
+                <a:latin typeface="+mj-lt"/>
+                <a:ea typeface="Microsoft YaHei" panose="020B0503020204020204" pitchFamily="34" charset="-122"/>
+              </a:rPr>
+              <a:t>、</a:t>
+            </a:r>
+            <a:r>
+              <a:rPr kumimoji="1" lang="en-US" altLang="zh-CN" sz="5400" spc="0" dirty="0" smtClean="0">
+                <a:ln w="12700">
+                  <a:noFill/>
+                </a:ln>
+                <a:solidFill>
+                  <a:srgbClr val="EF5149"/>
+                </a:solidFill>
+                <a:latin typeface="+mj-lt"/>
+                <a:ea typeface="Microsoft YaHei" panose="020B0503020204020204" pitchFamily="34" charset="-122"/>
+              </a:rPr>
+              <a:t>Alarm</a:t>
             </a:r>
             <a:endParaRPr kumimoji="1" lang="zh-TW" altLang="en-US" sz="5400" spc="0" dirty="0">
               <a:ln w="12700">
@@ -6122,6 +6215,39 @@
 </file>
 
 <file path=customXml/item1.xml><?xml version="1.0" encoding="utf-8"?>
+<p:properties xmlns:p="http://schemas.microsoft.com/office/2006/metadata/properties" xmlns:xsi="http://www.w3.org/2001/XMLSchema-instance" xmlns:pc="http://schemas.microsoft.com/office/infopath/2007/PartnerControls">
+  <documentManagement>
+    <SharedWithUsers xmlns="734a0fd3-5ab2-4644-a33f-a088ed12cd6e">
+      <UserInfo>
+        <DisplayName>Miffy Wang (王鈴慧)</DisplayName>
+        <AccountId>154</AccountId>
+        <AccountType/>
+      </UserInfo>
+      <UserInfo>
+        <DisplayName>Hans (TestWVD)</DisplayName>
+        <AccountId>8125</AccountId>
+        <AccountType/>
+      </UserInfo>
+      <UserInfo>
+        <DisplayName>Mago Lin(林瑞芳)</DisplayName>
+        <AccountId>826</AccountId>
+        <AccountType/>
+      </UserInfo>
+    </SharedWithUsers>
+  </documentManagement>
+</p:properties>
+</file>
+
+<file path=customXml/item2.xml><?xml version="1.0" encoding="utf-8"?>
+<?mso-contentType ?>
+<FormTemplates xmlns="http://schemas.microsoft.com/sharepoint/v3/contenttype/forms">
+  <Display>DocumentLibraryForm</Display>
+  <Edit>DocumentLibraryForm</Edit>
+  <New>DocumentLibraryForm</New>
+</FormTemplates>
+</file>
+
+<file path=customXml/item3.xml><?xml version="1.0" encoding="utf-8"?>
 <ct:contentTypeSchema xmlns:ct="http://schemas.microsoft.com/office/2006/metadata/contentType" xmlns:ma="http://schemas.microsoft.com/office/2006/metadata/properties/metaAttributes" ct:_="" ma:_="" ma:contentTypeName="Document" ma:contentTypeID="0x010100C1B1D48CF5C71C4B901469497BE97C95" ma:contentTypeVersion="6" ma:contentTypeDescription="Create a new document." ma:contentTypeScope="" ma:versionID="96b99486762059597dc29f6c66745e58">
   <xsd:schema xmlns:xsd="http://www.w3.org/2001/XMLSchema" xmlns:xs="http://www.w3.org/2001/XMLSchema" xmlns:p="http://schemas.microsoft.com/office/2006/metadata/properties" xmlns:ns2="8c574a9d-dc0a-44db-b9dd-00599ad78b7c" xmlns:ns3="734a0fd3-5ab2-4644-a33f-a088ed12cd6e" targetNamespace="http://schemas.microsoft.com/office/2006/metadata/properties" ma:root="true" ma:fieldsID="213c8db7c41208b185c321c03d4217c0" ns2:_="" ns3:_="">
     <xsd:import namespace="8c574a9d-dc0a-44db-b9dd-00599ad78b7c"/>
@@ -6298,40 +6424,32 @@
 </ct:contentTypeSchema>
 </file>
 
-<file path=customXml/item2.xml><?xml version="1.0" encoding="utf-8"?>
-<?mso-contentType ?>
-<FormTemplates xmlns="http://schemas.microsoft.com/sharepoint/v3/contenttype/forms">
-  <Display>DocumentLibraryForm</Display>
-  <Edit>DocumentLibraryForm</Edit>
-  <New>DocumentLibraryForm</New>
-</FormTemplates>
+<file path=customXml/itemProps1.xml><?xml version="1.0" encoding="utf-8"?>
+<ds:datastoreItem xmlns:ds="http://schemas.openxmlformats.org/officeDocument/2006/customXml" ds:itemID="{A8C0F7E1-9319-452E-8E07-45B1E0A0FBE0}">
+  <ds:schemaRefs>
+    <ds:schemaRef ds:uri="http://purl.org/dc/dcmitype/"/>
+    <ds:schemaRef ds:uri="734a0fd3-5ab2-4644-a33f-a088ed12cd6e"/>
+    <ds:schemaRef ds:uri="http://purl.org/dc/elements/1.1/"/>
+    <ds:schemaRef ds:uri="8c574a9d-dc0a-44db-b9dd-00599ad78b7c"/>
+    <ds:schemaRef ds:uri="http://purl.org/dc/terms/"/>
+    <ds:schemaRef ds:uri="http://schemas.microsoft.com/office/2006/documentManagement/types"/>
+    <ds:schemaRef ds:uri="http://www.w3.org/XML/1998/namespace"/>
+    <ds:schemaRef ds:uri="http://schemas.microsoft.com/office/infopath/2007/PartnerControls"/>
+    <ds:schemaRef ds:uri="http://schemas.openxmlformats.org/package/2006/metadata/core-properties"/>
+    <ds:schemaRef ds:uri="http://schemas.microsoft.com/office/2006/metadata/properties"/>
+  </ds:schemaRefs>
+</ds:datastoreItem>
 </file>
 
-<file path=customXml/item3.xml><?xml version="1.0" encoding="utf-8"?>
-<p:properties xmlns:p="http://schemas.microsoft.com/office/2006/metadata/properties" xmlns:xsi="http://www.w3.org/2001/XMLSchema-instance" xmlns:pc="http://schemas.microsoft.com/office/infopath/2007/PartnerControls">
-  <documentManagement>
-    <SharedWithUsers xmlns="734a0fd3-5ab2-4644-a33f-a088ed12cd6e">
-      <UserInfo>
-        <DisplayName>Miffy Wang (王鈴慧)</DisplayName>
-        <AccountId>154</AccountId>
-        <AccountType/>
-      </UserInfo>
-      <UserInfo>
-        <DisplayName>Hans (TestWVD)</DisplayName>
-        <AccountId>8125</AccountId>
-        <AccountType/>
-      </UserInfo>
-      <UserInfo>
-        <DisplayName>Mago Lin(林瑞芳)</DisplayName>
-        <AccountId>826</AccountId>
-        <AccountType/>
-      </UserInfo>
-    </SharedWithUsers>
-  </documentManagement>
-</p:properties>
+<file path=customXml/itemProps2.xml><?xml version="1.0" encoding="utf-8"?>
+<ds:datastoreItem xmlns:ds="http://schemas.openxmlformats.org/officeDocument/2006/customXml" ds:itemID="{91AA1840-26A9-4EBE-82FD-3B9FDF707969}">
+  <ds:schemaRefs>
+    <ds:schemaRef ds:uri="http://schemas.microsoft.com/sharepoint/v3/contenttype/forms"/>
+  </ds:schemaRefs>
+</ds:datastoreItem>
 </file>
 
-<file path=customXml/itemProps1.xml><?xml version="1.0" encoding="utf-8"?>
+<file path=customXml/itemProps3.xml><?xml version="1.0" encoding="utf-8"?>
 <ds:datastoreItem xmlns:ds="http://schemas.openxmlformats.org/officeDocument/2006/customXml" ds:itemID="{6830EA8A-6558-4099-9001-B5EE08A0926F}">
   <ds:schemaRefs>
     <ds:schemaRef ds:uri="http://schemas.microsoft.com/office/2006/metadata/contentType"/>
@@ -6348,29 +6466,4 @@
     <ds:schemaRef ds:uri="http://schemas.microsoft.com/internal/obd"/>
   </ds:schemaRefs>
 </ds:datastoreItem>
-</file>
-
-<file path=customXml/itemProps2.xml><?xml version="1.0" encoding="utf-8"?>
-<ds:datastoreItem xmlns:ds="http://schemas.openxmlformats.org/officeDocument/2006/customXml" ds:itemID="{91AA1840-26A9-4EBE-82FD-3B9FDF707969}">
-  <ds:schemaRefs>
-    <ds:schemaRef ds:uri="http://schemas.microsoft.com/sharepoint/v3/contenttype/forms"/>
-  </ds:schemaRefs>
-</ds:datastoreItem>
-</file>
-
-<file path=customXml/itemProps3.xml><?xml version="1.0" encoding="utf-8"?>
-<ds:datastoreItem xmlns:ds="http://schemas.openxmlformats.org/officeDocument/2006/customXml" ds:itemID="{A8C0F7E1-9319-452E-8E07-45B1E0A0FBE0}">
-  <ds:schemaRefs>
-    <ds:schemaRef ds:uri="http://purl.org/dc/dcmitype/"/>
-    <ds:schemaRef ds:uri="734a0fd3-5ab2-4644-a33f-a088ed12cd6e"/>
-    <ds:schemaRef ds:uri="http://purl.org/dc/elements/1.1/"/>
-    <ds:schemaRef ds:uri="8c574a9d-dc0a-44db-b9dd-00599ad78b7c"/>
-    <ds:schemaRef ds:uri="http://purl.org/dc/terms/"/>
-    <ds:schemaRef ds:uri="http://schemas.microsoft.com/office/2006/documentManagement/types"/>
-    <ds:schemaRef ds:uri="http://www.w3.org/XML/1998/namespace"/>
-    <ds:schemaRef ds:uri="http://schemas.microsoft.com/office/infopath/2007/PartnerControls"/>
-    <ds:schemaRef ds:uri="http://schemas.openxmlformats.org/package/2006/metadata/core-properties"/>
-    <ds:schemaRef ds:uri="http://schemas.microsoft.com/office/2006/metadata/properties"/>
-  </ds:schemaRefs>
-</ds:datastoreItem>
 </file>